--- a/slides/slide_20.pptx
+++ b/slides/slide_20.pptx
@@ -26,61 +26,38 @@
       <p:bold r:id="rId9"/>
     </p:embeddedFont>
     <p:embeddedFont>
-      <p:font typeface="Bebas Neue" panose="020B0606020202050201" pitchFamily="2" charset="0"/>
+      <p:font typeface="Hanken Grotesk" panose="020B0604020202020204" charset="0"/>
       <p:regular r:id="rId10"/>
-    </p:embeddedFont>
-    <p:embeddedFont>
-      <p:font typeface="DM Mono" panose="020B0509040201040103" pitchFamily="1" charset="0"/>
-      <p:regular r:id="rId11"/>
+      <p:bold r:id="rId11"/>
       <p:italic r:id="rId12"/>
-    </p:embeddedFont>
-    <p:embeddedFont>
-      <p:font typeface="Hanken Grotesk" panose="020B0604020202020204" charset="0"/>
-      <p:regular r:id="rId13"/>
-      <p:bold r:id="rId14"/>
-      <p:italic r:id="rId15"/>
-      <p:boldItalic r:id="rId16"/>
-    </p:embeddedFont>
-    <p:embeddedFont>
-      <p:font typeface="Open Sans" panose="020B0606030504020204" pitchFamily="2" charset="0"/>
-      <p:regular r:id="rId17"/>
-      <p:bold r:id="rId18"/>
-      <p:italic r:id="rId19"/>
-      <p:boldItalic r:id="rId20"/>
+      <p:boldItalic r:id="rId13"/>
     </p:embeddedFont>
     <p:embeddedFont>
       <p:font typeface="Raleway" pitchFamily="2" charset="0"/>
-      <p:regular r:id="rId21"/>
-      <p:bold r:id="rId22"/>
-      <p:italic r:id="rId23"/>
-      <p:boldItalic r:id="rId24"/>
+      <p:regular r:id="rId14"/>
+      <p:bold r:id="rId15"/>
+      <p:italic r:id="rId16"/>
+      <p:boldItalic r:id="rId17"/>
     </p:embeddedFont>
     <p:embeddedFont>
       <p:font typeface="Raleway Black" pitchFamily="2" charset="0"/>
-      <p:bold r:id="rId25"/>
-      <p:boldItalic r:id="rId26"/>
+      <p:bold r:id="rId18"/>
+      <p:boldItalic r:id="rId19"/>
     </p:embeddedFont>
     <p:embeddedFont>
       <p:font typeface="Raleway ExtraBold" pitchFamily="2" charset="0"/>
-      <p:bold r:id="rId27"/>
-      <p:boldItalic r:id="rId28"/>
+      <p:bold r:id="rId20"/>
+      <p:boldItalic r:id="rId21"/>
     </p:embeddedFont>
     <p:embeddedFont>
       <p:font typeface="Roboto Medium" panose="02000000000000000000" pitchFamily="2" charset="0"/>
-      <p:regular r:id="rId29"/>
-      <p:italic r:id="rId30"/>
+      <p:regular r:id="rId22"/>
+      <p:italic r:id="rId23"/>
     </p:embeddedFont>
     <p:embeddedFont>
       <p:font typeface="Roboto" panose="02000000000000000000" pitchFamily="2"/>
-      <p:bold r:id="rId31"/>
-      <p:boldItalic r:id="rId32"/>
-    </p:embeddedFont>
-    <p:embeddedFont>
-      <p:font typeface="Segoe UI" panose="020B0502040204020203" pitchFamily="2" charset="0"/>
-      <p:regular r:id="rId33"/>
-      <p:bold r:id="rId34"/>
-      <p:italic r:id="rId35"/>
-      <p:boldItalic r:id="rId36"/>
+      <p:bold r:id="rId24"/>
+      <p:boldItalic r:id="rId25"/>
     </p:embeddedFont>
   </p:embeddedFontLst>
   <p:custDataLst>
@@ -884,7 +861,7 @@
           <a:bodyPr/>
           <a:lstStyle/>
           <a:p>
-            <a:fld id="{CF614BFB-5557-45BF-BD44-0894D4F0DA56}" type="datetimeFigureOut">
+            <a:fld id="{EA17445A-DC03-487F-BA7F-921AE628C738}" type="datetimeFigureOut">
               <a:rPr lang="en-US" smtClean="0"/>
               <a:t>11/7/2009</a:t>
             </a:fld>
@@ -1048,7 +1025,7 @@
           <a:bodyPr/>
           <a:lstStyle/>
           <a:p>
-            <a:fld id="{BCE41308-94C6-4F67-A234-85E22C16DA1F}" type="datetimeFigureOut">
+            <a:fld id="{A10B98FE-A9C9-4435-A54D-E6B9BE97A79C}" type="datetimeFigureOut">
               <a:rPr lang="en-US" smtClean="0"/>
               <a:t>11/7/2009</a:t>
             </a:fld>
@@ -1212,7 +1189,7 @@
           <a:bodyPr/>
           <a:lstStyle/>
           <a:p>
-            <a:fld id="{2B8D1FE3-AD20-4E0B-B0F2-6FFDDE9629DB}" type="datetimeFigureOut">
+            <a:fld id="{6285CC7E-6505-4562-99E8-92C56CDBB567}" type="datetimeFigureOut">
               <a:rPr lang="en-US" smtClean="0"/>
               <a:t>11/7/2009</a:t>
             </a:fld>
@@ -1559,7 +1536,7 @@
           <a:bodyPr/>
           <a:lstStyle/>
           <a:p>
-            <a:fld id="{0F5AF750-1A1B-419C-8357-A59EE52B6F9C}" type="datetimeFigureOut">
+            <a:fld id="{6F2AF32E-694B-42FB-82ED-0AB71C91DF36}" type="datetimeFigureOut">
               <a:rPr lang="en-US" smtClean="0"/>
               <a:t>11/7/2009</a:t>
             </a:fld>
@@ -1789,7 +1766,7 @@
           <a:bodyPr/>
           <a:lstStyle/>
           <a:p>
-            <a:fld id="{18D990FE-7AEA-4392-B713-C6E98F200BFD}" type="datetimeFigureOut">
+            <a:fld id="{752F939F-9442-4D14-BCE2-DBFAB0690E2F}" type="datetimeFigureOut">
               <a:rPr lang="en-US" smtClean="0"/>
               <a:t>11/7/2009</a:t>
             </a:fld>
@@ -2060,7 +2037,7 @@
           <a:bodyPr/>
           <a:lstStyle/>
           <a:p>
-            <a:fld id="{4B10A2B3-E51E-46F7-9D76-17A811B503DC}" type="datetimeFigureOut">
+            <a:fld id="{E4DBC373-BA26-4E90-9348-C51302D59572}" type="datetimeFigureOut">
               <a:rPr lang="en-US" smtClean="0"/>
               <a:t>11/7/2009</a:t>
             </a:fld>
@@ -2449,7 +2426,7 @@
           <a:bodyPr/>
           <a:lstStyle/>
           <a:p>
-            <a:fld id="{850E4534-87B6-49B6-AD17-4450AECE6DF9}" type="datetimeFigureOut">
+            <a:fld id="{5489AC0C-A64A-4126-96DD-D731E115493E}" type="datetimeFigureOut">
               <a:rPr lang="en-US" smtClean="0"/>
               <a:t>11/7/2009</a:t>
             </a:fld>
@@ -2562,7 +2539,7 @@
           <a:bodyPr/>
           <a:lstStyle/>
           <a:p>
-            <a:fld id="{08F764A7-9C0A-4CB8-980F-69884A342571}" type="datetimeFigureOut">
+            <a:fld id="{D570727F-2871-48EA-9EF3-5BF755FE1F20}" type="datetimeFigureOut">
               <a:rPr lang="en-US" smtClean="0"/>
               <a:t>11/7/2009</a:t>
             </a:fld>
@@ -2652,7 +2629,7 @@
           <a:bodyPr/>
           <a:lstStyle/>
           <a:p>
-            <a:fld id="{95E1DB6F-5292-4C8E-98DB-7F8538B637DF}" type="datetimeFigureOut">
+            <a:fld id="{CE8CBF81-1E1C-400A-8DD6-E35BFDB61106}" type="datetimeFigureOut">
               <a:rPr lang="en-US" smtClean="0"/>
               <a:t>11/7/2009</a:t>
             </a:fld>
@@ -2907,7 +2884,7 @@
           <a:bodyPr/>
           <a:lstStyle/>
           <a:p>
-            <a:fld id="{20FB4441-EFE1-429A-A46F-8AE4CAB59352}" type="datetimeFigureOut">
+            <a:fld id="{35B5E3CC-3EC9-47F4-B3A3-FA5E1CAC607C}" type="datetimeFigureOut">
               <a:rPr lang="en-US" smtClean="0"/>
               <a:t>11/7/2009</a:t>
             </a:fld>
@@ -3139,7 +3116,7 @@
           <a:bodyPr/>
           <a:lstStyle/>
           <a:p>
-            <a:fld id="{F7C73F5E-F865-4EDB-AC53-E29602B56572}" type="datetimeFigureOut">
+            <a:fld id="{18978DF2-88AA-4EFA-BC6D-F6B1FA5EE1B4}" type="datetimeFigureOut">
               <a:rPr lang="en-US" smtClean="0"/>
               <a:t>11/7/2009</a:t>
             </a:fld>

--- a/slides/slide_20.pptx
+++ b/slides/slide_20.pptx
@@ -861,7 +861,7 @@
           <a:bodyPr/>
           <a:lstStyle/>
           <a:p>
-            <a:fld id="{EA17445A-DC03-487F-BA7F-921AE628C738}" type="datetimeFigureOut">
+            <a:fld id="{2B3B5C42-DCD3-4AE8-946A-0939473CB149}" type="datetimeFigureOut">
               <a:rPr lang="en-US" smtClean="0"/>
               <a:t>11/7/2009</a:t>
             </a:fld>
@@ -1025,7 +1025,7 @@
           <a:bodyPr/>
           <a:lstStyle/>
           <a:p>
-            <a:fld id="{A10B98FE-A9C9-4435-A54D-E6B9BE97A79C}" type="datetimeFigureOut">
+            <a:fld id="{4CB1F3CE-4DCD-4DF6-88BE-D80528904639}" type="datetimeFigureOut">
               <a:rPr lang="en-US" smtClean="0"/>
               <a:t>11/7/2009</a:t>
             </a:fld>
@@ -1189,7 +1189,7 @@
           <a:bodyPr/>
           <a:lstStyle/>
           <a:p>
-            <a:fld id="{6285CC7E-6505-4562-99E8-92C56CDBB567}" type="datetimeFigureOut">
+            <a:fld id="{813BCCBE-9760-43A2-B980-90725F42EF67}" type="datetimeFigureOut">
               <a:rPr lang="en-US" smtClean="0"/>
               <a:t>11/7/2009</a:t>
             </a:fld>
@@ -1536,7 +1536,7 @@
           <a:bodyPr/>
           <a:lstStyle/>
           <a:p>
-            <a:fld id="{6F2AF32E-694B-42FB-82ED-0AB71C91DF36}" type="datetimeFigureOut">
+            <a:fld id="{11EB97B6-4571-4370-B5F4-40EC9DDCB030}" type="datetimeFigureOut">
               <a:rPr lang="en-US" smtClean="0"/>
               <a:t>11/7/2009</a:t>
             </a:fld>
@@ -1766,7 +1766,7 @@
           <a:bodyPr/>
           <a:lstStyle/>
           <a:p>
-            <a:fld id="{752F939F-9442-4D14-BCE2-DBFAB0690E2F}" type="datetimeFigureOut">
+            <a:fld id="{15965DB6-F9B1-44F6-A29A-59680C681A2E}" type="datetimeFigureOut">
               <a:rPr lang="en-US" smtClean="0"/>
               <a:t>11/7/2009</a:t>
             </a:fld>
@@ -2037,7 +2037,7 @@
           <a:bodyPr/>
           <a:lstStyle/>
           <a:p>
-            <a:fld id="{E4DBC373-BA26-4E90-9348-C51302D59572}" type="datetimeFigureOut">
+            <a:fld id="{D7655D45-6D31-417D-8251-0D19B482C48C}" type="datetimeFigureOut">
               <a:rPr lang="en-US" smtClean="0"/>
               <a:t>11/7/2009</a:t>
             </a:fld>
@@ -2426,7 +2426,7 @@
           <a:bodyPr/>
           <a:lstStyle/>
           <a:p>
-            <a:fld id="{5489AC0C-A64A-4126-96DD-D731E115493E}" type="datetimeFigureOut">
+            <a:fld id="{63F90B08-B561-40A6-A689-CA5D585B9C5E}" type="datetimeFigureOut">
               <a:rPr lang="en-US" smtClean="0"/>
               <a:t>11/7/2009</a:t>
             </a:fld>
@@ -2539,7 +2539,7 @@
           <a:bodyPr/>
           <a:lstStyle/>
           <a:p>
-            <a:fld id="{D570727F-2871-48EA-9EF3-5BF755FE1F20}" type="datetimeFigureOut">
+            <a:fld id="{A1360AD6-A702-4F10-8859-D7D7A5B54207}" type="datetimeFigureOut">
               <a:rPr lang="en-US" smtClean="0"/>
               <a:t>11/7/2009</a:t>
             </a:fld>
@@ -2629,7 +2629,7 @@
           <a:bodyPr/>
           <a:lstStyle/>
           <a:p>
-            <a:fld id="{CE8CBF81-1E1C-400A-8DD6-E35BFDB61106}" type="datetimeFigureOut">
+            <a:fld id="{B207BE71-BBDE-45FD-890B-12E3C6474091}" type="datetimeFigureOut">
               <a:rPr lang="en-US" smtClean="0"/>
               <a:t>11/7/2009</a:t>
             </a:fld>
@@ -2884,7 +2884,7 @@
           <a:bodyPr/>
           <a:lstStyle/>
           <a:p>
-            <a:fld id="{35B5E3CC-3EC9-47F4-B3A3-FA5E1CAC607C}" type="datetimeFigureOut">
+            <a:fld id="{DF6D4695-87F4-4F01-A613-5FE35C2C4959}" type="datetimeFigureOut">
               <a:rPr lang="en-US" smtClean="0"/>
               <a:t>11/7/2009</a:t>
             </a:fld>
@@ -3116,7 +3116,7 @@
           <a:bodyPr/>
           <a:lstStyle/>
           <a:p>
-            <a:fld id="{18978DF2-88AA-4EFA-BC6D-F6B1FA5EE1B4}" type="datetimeFigureOut">
+            <a:fld id="{FE2BB61C-CE69-4677-A9C7-26CC2E0DB01F}" type="datetimeFigureOut">
               <a:rPr lang="en-US" smtClean="0"/>
               <a:t>11/7/2009</a:t>
             </a:fld>

--- a/slides/slide_20.pptx
+++ b/slides/slide_20.pptx
@@ -1,6 +1,6 @@
 
 <file path=ppt/presentation.xml><?xml version="1.0" encoding="utf-8"?>
-<!--Generated by Aspose.Slides for .NET 24.12-->
+<!--Generated by Aspose.Slides for .NET 24.2-->
 <p:presentation xmlns:r="http://schemas.openxmlformats.org/officeDocument/2006/relationships" xmlns:a="http://schemas.openxmlformats.org/drawingml/2006/main" xmlns:p="http://schemas.openxmlformats.org/presentationml/2006/main" embedTrueTypeFonts="1" saveSubsetFonts="1">
   <p:sldMasterIdLst>
     <p:sldMasterId id="2147483648" r:id="rId1"/>
@@ -861,7 +861,7 @@
           <a:bodyPr/>
           <a:lstStyle/>
           <a:p>
-            <a:fld id="{2B3B5C42-DCD3-4AE8-946A-0939473CB149}" type="datetimeFigureOut">
+            <a:fld id="{CFA78FC3-A149-449F-9FC2-1A4EC6950227}" type="datetimeFigureOut">
               <a:rPr lang="en-US" smtClean="0"/>
               <a:t>11/7/2009</a:t>
             </a:fld>
@@ -1025,7 +1025,7 @@
           <a:bodyPr/>
           <a:lstStyle/>
           <a:p>
-            <a:fld id="{4CB1F3CE-4DCD-4DF6-88BE-D80528904639}" type="datetimeFigureOut">
+            <a:fld id="{21C09C64-3CA0-4A49-A9AB-4E97612D6156}" type="datetimeFigureOut">
               <a:rPr lang="en-US" smtClean="0"/>
               <a:t>11/7/2009</a:t>
             </a:fld>
@@ -1189,7 +1189,7 @@
           <a:bodyPr/>
           <a:lstStyle/>
           <a:p>
-            <a:fld id="{813BCCBE-9760-43A2-B980-90725F42EF67}" type="datetimeFigureOut">
+            <a:fld id="{F16CD9C9-FC7E-40BB-B66A-897F9DC06D2A}" type="datetimeFigureOut">
               <a:rPr lang="en-US" smtClean="0"/>
               <a:t>11/7/2009</a:t>
             </a:fld>
@@ -1536,7 +1536,7 @@
           <a:bodyPr/>
           <a:lstStyle/>
           <a:p>
-            <a:fld id="{11EB97B6-4571-4370-B5F4-40EC9DDCB030}" type="datetimeFigureOut">
+            <a:fld id="{4D27F53E-E41B-4E3E-A214-C67EDF254E79}" type="datetimeFigureOut">
               <a:rPr lang="en-US" smtClean="0"/>
               <a:t>11/7/2009</a:t>
             </a:fld>
@@ -1766,7 +1766,7 @@
           <a:bodyPr/>
           <a:lstStyle/>
           <a:p>
-            <a:fld id="{15965DB6-F9B1-44F6-A29A-59680C681A2E}" type="datetimeFigureOut">
+            <a:fld id="{62D63B28-CB60-4013-8495-EE7675F02155}" type="datetimeFigureOut">
               <a:rPr lang="en-US" smtClean="0"/>
               <a:t>11/7/2009</a:t>
             </a:fld>
@@ -2037,7 +2037,7 @@
           <a:bodyPr/>
           <a:lstStyle/>
           <a:p>
-            <a:fld id="{D7655D45-6D31-417D-8251-0D19B482C48C}" type="datetimeFigureOut">
+            <a:fld id="{A6D2D17A-0F5B-49B0-98F3-FED35ED42E6A}" type="datetimeFigureOut">
               <a:rPr lang="en-US" smtClean="0"/>
               <a:t>11/7/2009</a:t>
             </a:fld>
@@ -2426,7 +2426,7 @@
           <a:bodyPr/>
           <a:lstStyle/>
           <a:p>
-            <a:fld id="{63F90B08-B561-40A6-A689-CA5D585B9C5E}" type="datetimeFigureOut">
+            <a:fld id="{ADB0BD5D-A423-4523-91EE-5BC7057E50B4}" type="datetimeFigureOut">
               <a:rPr lang="en-US" smtClean="0"/>
               <a:t>11/7/2009</a:t>
             </a:fld>
@@ -2539,7 +2539,7 @@
           <a:bodyPr/>
           <a:lstStyle/>
           <a:p>
-            <a:fld id="{A1360AD6-A702-4F10-8859-D7D7A5B54207}" type="datetimeFigureOut">
+            <a:fld id="{0A3A4D7E-066E-42DF-9B12-21A26856A303}" type="datetimeFigureOut">
               <a:rPr lang="en-US" smtClean="0"/>
               <a:t>11/7/2009</a:t>
             </a:fld>
@@ -2629,7 +2629,7 @@
           <a:bodyPr/>
           <a:lstStyle/>
           <a:p>
-            <a:fld id="{B207BE71-BBDE-45FD-890B-12E3C6474091}" type="datetimeFigureOut">
+            <a:fld id="{058E8D32-657B-447E-A9B9-6E45FAD4EA94}" type="datetimeFigureOut">
               <a:rPr lang="en-US" smtClean="0"/>
               <a:t>11/7/2009</a:t>
             </a:fld>
@@ -2884,7 +2884,7 @@
           <a:bodyPr/>
           <a:lstStyle/>
           <a:p>
-            <a:fld id="{DF6D4695-87F4-4F01-A613-5FE35C2C4959}" type="datetimeFigureOut">
+            <a:fld id="{1CD91CE4-0044-4A3D-9E76-6C71D1845E46}" type="datetimeFigureOut">
               <a:rPr lang="en-US" smtClean="0"/>
               <a:t>11/7/2009</a:t>
             </a:fld>
@@ -3116,7 +3116,7 @@
           <a:bodyPr/>
           <a:lstStyle/>
           <a:p>
-            <a:fld id="{FE2BB61C-CE69-4677-A9C7-26CC2E0DB01F}" type="datetimeFigureOut">
+            <a:fld id="{F1514856-99F5-4CBF-87EF-B8550F345604}" type="datetimeFigureOut">
               <a:rPr lang="en-US" smtClean="0"/>
               <a:t>11/7/2009</a:t>
             </a:fld>
@@ -47947,11 +47947,11 @@
 
 <file path=ppt/tags/tag1.xml><?xml version="1.0" encoding="utf-8"?>
 <p:tagLst xmlns:p="http://schemas.openxmlformats.org/presentationml/2006/main">
-  <p:tag name="AS_NET" val="7.0.20"/>
-  <p:tag name="AS_OS" val="Microsoft Windows NT 10.0.20348.0"/>
-  <p:tag name="AS_RELEASE_DATE" val="2024.12.14"/>
-  <p:tag name="AS_TITLE" val="Aspose.Slides for .NET Standard 2.1"/>
-  <p:tag name="AS_VERSION" val="24.12"/>
+  <p:tag name="AS_NET" val="6.0.36"/>
+  <p:tag name="AS_OS" val="Unix 5.4.0.216"/>
+  <p:tag name="AS_RELEASE_DATE" val="2024.02.14"/>
+  <p:tag name="AS_TITLE" val="Aspose.Slides for .NET Standard 2.0"/>
+  <p:tag name="AS_VERSION" val="24.2"/>
 </p:tagLst>
 </file>
 

--- a/slides/slide_20.pptx
+++ b/slides/slide_20.pptx
@@ -861,7 +861,7 @@
           <a:bodyPr/>
           <a:lstStyle/>
           <a:p>
-            <a:fld id="{CFA78FC3-A149-449F-9FC2-1A4EC6950227}" type="datetimeFigureOut">
+            <a:fld id="{2021A8BA-4EED-4781-B9D3-2DCA4DBC64AA}" type="datetimeFigureOut">
               <a:rPr lang="en-US" smtClean="0"/>
               <a:t>11/7/2009</a:t>
             </a:fld>
@@ -1025,7 +1025,7 @@
           <a:bodyPr/>
           <a:lstStyle/>
           <a:p>
-            <a:fld id="{21C09C64-3CA0-4A49-A9AB-4E97612D6156}" type="datetimeFigureOut">
+            <a:fld id="{10A5C1BD-39E3-45F6-B532-E8D60732EBC0}" type="datetimeFigureOut">
               <a:rPr lang="en-US" smtClean="0"/>
               <a:t>11/7/2009</a:t>
             </a:fld>
@@ -1189,7 +1189,7 @@
           <a:bodyPr/>
           <a:lstStyle/>
           <a:p>
-            <a:fld id="{F16CD9C9-FC7E-40BB-B66A-897F9DC06D2A}" type="datetimeFigureOut">
+            <a:fld id="{D46228E6-0DD7-46B6-8E82-0C32D8C27F4C}" type="datetimeFigureOut">
               <a:rPr lang="en-US" smtClean="0"/>
               <a:t>11/7/2009</a:t>
             </a:fld>
@@ -1536,7 +1536,7 @@
           <a:bodyPr/>
           <a:lstStyle/>
           <a:p>
-            <a:fld id="{4D27F53E-E41B-4E3E-A214-C67EDF254E79}" type="datetimeFigureOut">
+            <a:fld id="{3DAD7D70-F355-4218-B491-932B5F6C092E}" type="datetimeFigureOut">
               <a:rPr lang="en-US" smtClean="0"/>
               <a:t>11/7/2009</a:t>
             </a:fld>
@@ -1766,7 +1766,7 @@
           <a:bodyPr/>
           <a:lstStyle/>
           <a:p>
-            <a:fld id="{62D63B28-CB60-4013-8495-EE7675F02155}" type="datetimeFigureOut">
+            <a:fld id="{755E0AD7-20EF-4A00-85EE-7C756476F304}" type="datetimeFigureOut">
               <a:rPr lang="en-US" smtClean="0"/>
               <a:t>11/7/2009</a:t>
             </a:fld>
@@ -2037,7 +2037,7 @@
           <a:bodyPr/>
           <a:lstStyle/>
           <a:p>
-            <a:fld id="{A6D2D17A-0F5B-49B0-98F3-FED35ED42E6A}" type="datetimeFigureOut">
+            <a:fld id="{37F21DCE-BD49-47C0-978D-2601F120737A}" type="datetimeFigureOut">
               <a:rPr lang="en-US" smtClean="0"/>
               <a:t>11/7/2009</a:t>
             </a:fld>
@@ -2426,7 +2426,7 @@
           <a:bodyPr/>
           <a:lstStyle/>
           <a:p>
-            <a:fld id="{ADB0BD5D-A423-4523-91EE-5BC7057E50B4}" type="datetimeFigureOut">
+            <a:fld id="{B15FF98B-8CD2-42C9-93BB-3126B6F6AC7B}" type="datetimeFigureOut">
               <a:rPr lang="en-US" smtClean="0"/>
               <a:t>11/7/2009</a:t>
             </a:fld>
@@ -2539,7 +2539,7 @@
           <a:bodyPr/>
           <a:lstStyle/>
           <a:p>
-            <a:fld id="{0A3A4D7E-066E-42DF-9B12-21A26856A303}" type="datetimeFigureOut">
+            <a:fld id="{259CC168-3B9F-4FB6-A915-584A4BEBDFFF}" type="datetimeFigureOut">
               <a:rPr lang="en-US" smtClean="0"/>
               <a:t>11/7/2009</a:t>
             </a:fld>
@@ -2629,7 +2629,7 @@
           <a:bodyPr/>
           <a:lstStyle/>
           <a:p>
-            <a:fld id="{058E8D32-657B-447E-A9B9-6E45FAD4EA94}" type="datetimeFigureOut">
+            <a:fld id="{890B71AD-37A8-4B6F-A393-566DA720708B}" type="datetimeFigureOut">
               <a:rPr lang="en-US" smtClean="0"/>
               <a:t>11/7/2009</a:t>
             </a:fld>
@@ -2884,7 +2884,7 @@
           <a:bodyPr/>
           <a:lstStyle/>
           <a:p>
-            <a:fld id="{1CD91CE4-0044-4A3D-9E76-6C71D1845E46}" type="datetimeFigureOut">
+            <a:fld id="{7DEA0980-FD8C-49AA-B3DF-D2542D0D4054}" type="datetimeFigureOut">
               <a:rPr lang="en-US" smtClean="0"/>
               <a:t>11/7/2009</a:t>
             </a:fld>
@@ -3116,7 +3116,7 @@
           <a:bodyPr/>
           <a:lstStyle/>
           <a:p>
-            <a:fld id="{F1514856-99F5-4CBF-87EF-B8550F345604}" type="datetimeFigureOut">
+            <a:fld id="{703C980B-B34D-4430-8BE4-DA4D93B02312}" type="datetimeFigureOut">
               <a:rPr lang="en-US" smtClean="0"/>
               <a:t>11/7/2009</a:t>
             </a:fld>
